--- a/docs/ui-kit/deck/Oshinei-Business-Deck.pptx
+++ b/docs/ui-kit/deck/Oshinei-Business-Deck.pptx
@@ -2357,13 +2357,18 @@
             <a:off x="868680" y="2651760"/>
             <a:ext cx="566928" cy="566928"/>
           </a:xfrm>
-          <a:prstGeom prst="ellipse">
+          <a:prstGeom prst="rect">
             <a:avLst/>
           </a:prstGeom>
           <a:solidFill>
-            <a:srgbClr val="EEF2FF"/>
+            <a:srgbClr val="FFFFFF"/>
           </a:solidFill>
-          <a:ln/>
+          <a:ln w="15875">
+            <a:solidFill>
+              <a:srgbClr val="1F3A6B"/>
+            </a:solidFill>
+            <a:prstDash val="solid"/>
+          </a:ln>
         </p:spPr>
       </p:sp>
       <p:sp>
@@ -2391,50 +2396,53 @@
               <a:buNone/>
             </a:pPr>
             <a:r>
-              <a:rPr lang="en-US" sz="2000" dirty="0">
-                <a:solidFill>
-                  <a:srgbClr val="000000"/>
-                </a:solidFill>
-              </a:rPr>
-              <a:t>📈</a:t>
-            </a:r>
-            <a:endParaRPr lang="en-US" sz="2000" dirty="0"/>
-          </a:p>
-        </p:txBody>
-      </p:sp>
-      <p:sp>
-        <p:nvSpPr>
-          <p:cNvPr id="23" name="Text 21"/>
-          <p:cNvSpPr/>
-          <p:nvPr/>
-        </p:nvSpPr>
-        <p:spPr>
-          <a:xfrm>
-            <a:off x="1645920" y="2633472"/>
-            <a:ext cx="4389120" cy="365760"/>
-          </a:xfrm>
-          <a:prstGeom prst="rect">
-            <a:avLst/>
-          </a:prstGeom>
-          <a:noFill/>
-          <a:ln/>
-        </p:spPr>
-        <p:txBody>
-          <a:bodyPr wrap="square" lIns="0" tIns="0" rIns="0" bIns="0" rtlCol="0" anchor="ctr"/>
-          <a:lstStyle/>
-          <a:p>
-            <a:pPr indent="0" marL="0">
-              <a:buNone/>
-            </a:pPr>
-            <a:r>
-              <a:rPr lang="en-US" sz="1700" b="1" dirty="0">
-                <a:solidFill>
-                  <a:srgbClr val="0F172A"/>
+              <a:rPr lang="en-US" sz="1400" b="1" dirty="0">
+                <a:solidFill>
+                  <a:srgbClr val="1F3A6B"/>
                 </a:solidFill>
                 <a:latin typeface="Georgia" pitchFamily="34" charset="0"/>
                 <a:ea typeface="Georgia" pitchFamily="34" charset="-122"/>
                 <a:cs typeface="Georgia" pitchFamily="34" charset="-120"/>
               </a:rPr>
+              <a:t>01</a:t>
+            </a:r>
+            <a:endParaRPr lang="en-US" sz="1400" dirty="0"/>
+          </a:p>
+        </p:txBody>
+      </p:sp>
+      <p:sp>
+        <p:nvSpPr>
+          <p:cNvPr id="23" name="Text 21"/>
+          <p:cNvSpPr/>
+          <p:nvPr/>
+        </p:nvSpPr>
+        <p:spPr>
+          <a:xfrm>
+            <a:off x="1645920" y="2633472"/>
+            <a:ext cx="4389120" cy="365760"/>
+          </a:xfrm>
+          <a:prstGeom prst="rect">
+            <a:avLst/>
+          </a:prstGeom>
+          <a:noFill/>
+          <a:ln/>
+        </p:spPr>
+        <p:txBody>
+          <a:bodyPr wrap="square" lIns="0" tIns="0" rIns="0" bIns="0" rtlCol="0" anchor="ctr"/>
+          <a:lstStyle/>
+          <a:p>
+            <a:pPr indent="0" marL="0">
+              <a:buNone/>
+            </a:pPr>
+            <a:r>
+              <a:rPr lang="en-US" sz="1700" b="1" dirty="0">
+                <a:solidFill>
+                  <a:srgbClr val="0F172A"/>
+                </a:solidFill>
+                <a:latin typeface="Georgia" pitchFamily="34" charset="0"/>
+                <a:ea typeface="Georgia" pitchFamily="34" charset="-122"/>
+                <a:cs typeface="Georgia" pitchFamily="34" charset="-120"/>
+              </a:rPr>
               <a:t>Revenue &amp; GP</a:t>
             </a:r>
             <a:endParaRPr lang="en-US" sz="1700" dirty="0"/>
@@ -2491,13 +2499,18 @@
             <a:off x="6355080" y="2651760"/>
             <a:ext cx="566928" cy="566928"/>
           </a:xfrm>
-          <a:prstGeom prst="ellipse">
+          <a:prstGeom prst="rect">
             <a:avLst/>
           </a:prstGeom>
           <a:solidFill>
-            <a:srgbClr val="EEF2FF"/>
+            <a:srgbClr val="FFFFFF"/>
           </a:solidFill>
-          <a:ln/>
+          <a:ln w="15875">
+            <a:solidFill>
+              <a:srgbClr val="1F3A6B"/>
+            </a:solidFill>
+            <a:prstDash val="solid"/>
+          </a:ln>
         </p:spPr>
       </p:sp>
       <p:sp>
@@ -2525,50 +2538,53 @@
               <a:buNone/>
             </a:pPr>
             <a:r>
-              <a:rPr lang="en-US" sz="2000" dirty="0">
-                <a:solidFill>
-                  <a:srgbClr val="000000"/>
-                </a:solidFill>
-              </a:rPr>
-              <a:t>⭐</a:t>
-            </a:r>
-            <a:endParaRPr lang="en-US" sz="2000" dirty="0"/>
-          </a:p>
-        </p:txBody>
-      </p:sp>
-      <p:sp>
-        <p:nvSpPr>
-          <p:cNvPr id="27" name="Text 25"/>
-          <p:cNvSpPr/>
-          <p:nvPr/>
-        </p:nvSpPr>
-        <p:spPr>
-          <a:xfrm>
-            <a:off x="7132320" y="2633472"/>
-            <a:ext cx="4389120" cy="365760"/>
-          </a:xfrm>
-          <a:prstGeom prst="rect">
-            <a:avLst/>
-          </a:prstGeom>
-          <a:noFill/>
-          <a:ln/>
-        </p:spPr>
-        <p:txBody>
-          <a:bodyPr wrap="square" lIns="0" tIns="0" rIns="0" bIns="0" rtlCol="0" anchor="ctr"/>
-          <a:lstStyle/>
-          <a:p>
-            <a:pPr indent="0" marL="0">
-              <a:buNone/>
-            </a:pPr>
-            <a:r>
-              <a:rPr lang="en-US" sz="1700" b="1" dirty="0">
-                <a:solidFill>
-                  <a:srgbClr val="0F172A"/>
+              <a:rPr lang="en-US" sz="1400" b="1" dirty="0">
+                <a:solidFill>
+                  <a:srgbClr val="1F3A6B"/>
                 </a:solidFill>
                 <a:latin typeface="Georgia" pitchFamily="34" charset="0"/>
                 <a:ea typeface="Georgia" pitchFamily="34" charset="-122"/>
                 <a:cs typeface="Georgia" pitchFamily="34" charset="-120"/>
               </a:rPr>
+              <a:t>02</a:t>
+            </a:r>
+            <a:endParaRPr lang="en-US" sz="1400" dirty="0"/>
+          </a:p>
+        </p:txBody>
+      </p:sp>
+      <p:sp>
+        <p:nvSpPr>
+          <p:cNvPr id="27" name="Text 25"/>
+          <p:cNvSpPr/>
+          <p:nvPr/>
+        </p:nvSpPr>
+        <p:spPr>
+          <a:xfrm>
+            <a:off x="7132320" y="2633472"/>
+            <a:ext cx="4389120" cy="365760"/>
+          </a:xfrm>
+          <a:prstGeom prst="rect">
+            <a:avLst/>
+          </a:prstGeom>
+          <a:noFill/>
+          <a:ln/>
+        </p:spPr>
+        <p:txBody>
+          <a:bodyPr wrap="square" lIns="0" tIns="0" rIns="0" bIns="0" rtlCol="0" anchor="ctr"/>
+          <a:lstStyle/>
+          <a:p>
+            <a:pPr indent="0" marL="0">
+              <a:buNone/>
+            </a:pPr>
+            <a:r>
+              <a:rPr lang="en-US" sz="1700" b="1" dirty="0">
+                <a:solidFill>
+                  <a:srgbClr val="0F172A"/>
+                </a:solidFill>
+                <a:latin typeface="Georgia" pitchFamily="34" charset="0"/>
+                <a:ea typeface="Georgia" pitchFamily="34" charset="-122"/>
+                <a:cs typeface="Georgia" pitchFamily="34" charset="-120"/>
+              </a:rPr>
               <a:t>Menu Engineering</a:t>
             </a:r>
             <a:endParaRPr lang="en-US" sz="1700" dirty="0"/>
@@ -2625,13 +2641,18 @@
             <a:off x="868680" y="4343400"/>
             <a:ext cx="566928" cy="566928"/>
           </a:xfrm>
-          <a:prstGeom prst="ellipse">
+          <a:prstGeom prst="rect">
             <a:avLst/>
           </a:prstGeom>
           <a:solidFill>
-            <a:srgbClr val="EEF2FF"/>
+            <a:srgbClr val="FFFFFF"/>
           </a:solidFill>
-          <a:ln/>
+          <a:ln w="15875">
+            <a:solidFill>
+              <a:srgbClr val="1F3A6B"/>
+            </a:solidFill>
+            <a:prstDash val="solid"/>
+          </a:ln>
         </p:spPr>
       </p:sp>
       <p:sp>
@@ -2659,50 +2680,53 @@
               <a:buNone/>
             </a:pPr>
             <a:r>
-              <a:rPr lang="en-US" sz="2000" dirty="0">
-                <a:solidFill>
-                  <a:srgbClr val="000000"/>
-                </a:solidFill>
-              </a:rPr>
-              <a:t>🎮</a:t>
-            </a:r>
-            <a:endParaRPr lang="en-US" sz="2000" dirty="0"/>
-          </a:p>
-        </p:txBody>
-      </p:sp>
-      <p:sp>
-        <p:nvSpPr>
-          <p:cNvPr id="31" name="Text 29"/>
-          <p:cNvSpPr/>
-          <p:nvPr/>
-        </p:nvSpPr>
-        <p:spPr>
-          <a:xfrm>
-            <a:off x="1645920" y="4325112"/>
-            <a:ext cx="4389120" cy="365760"/>
-          </a:xfrm>
-          <a:prstGeom prst="rect">
-            <a:avLst/>
-          </a:prstGeom>
-          <a:noFill/>
-          <a:ln/>
-        </p:spPr>
-        <p:txBody>
-          <a:bodyPr wrap="square" lIns="0" tIns="0" rIns="0" bIns="0" rtlCol="0" anchor="ctr"/>
-          <a:lstStyle/>
-          <a:p>
-            <a:pPr indent="0" marL="0">
-              <a:buNone/>
-            </a:pPr>
-            <a:r>
-              <a:rPr lang="en-US" sz="1700" b="1" dirty="0">
-                <a:solidFill>
-                  <a:srgbClr val="0F172A"/>
+              <a:rPr lang="en-US" sz="1400" b="1" dirty="0">
+                <a:solidFill>
+                  <a:srgbClr val="1F3A6B"/>
                 </a:solidFill>
                 <a:latin typeface="Georgia" pitchFamily="34" charset="0"/>
                 <a:ea typeface="Georgia" pitchFamily="34" charset="-122"/>
                 <a:cs typeface="Georgia" pitchFamily="34" charset="-120"/>
               </a:rPr>
+              <a:t>03</a:t>
+            </a:r>
+            <a:endParaRPr lang="en-US" sz="1400" dirty="0"/>
+          </a:p>
+        </p:txBody>
+      </p:sp>
+      <p:sp>
+        <p:nvSpPr>
+          <p:cNvPr id="31" name="Text 29"/>
+          <p:cNvSpPr/>
+          <p:nvPr/>
+        </p:nvSpPr>
+        <p:spPr>
+          <a:xfrm>
+            <a:off x="1645920" y="4325112"/>
+            <a:ext cx="4389120" cy="365760"/>
+          </a:xfrm>
+          <a:prstGeom prst="rect">
+            <a:avLst/>
+          </a:prstGeom>
+          <a:noFill/>
+          <a:ln/>
+        </p:spPr>
+        <p:txBody>
+          <a:bodyPr wrap="square" lIns="0" tIns="0" rIns="0" bIns="0" rtlCol="0" anchor="ctr"/>
+          <a:lstStyle/>
+          <a:p>
+            <a:pPr indent="0" marL="0">
+              <a:buNone/>
+            </a:pPr>
+            <a:r>
+              <a:rPr lang="en-US" sz="1700" b="1" dirty="0">
+                <a:solidFill>
+                  <a:srgbClr val="0F172A"/>
+                </a:solidFill>
+                <a:latin typeface="Georgia" pitchFamily="34" charset="0"/>
+                <a:ea typeface="Georgia" pitchFamily="34" charset="-122"/>
+                <a:cs typeface="Georgia" pitchFamily="34" charset="-120"/>
+              </a:rPr>
               <a:t>BoM Cost + Simulator</a:t>
             </a:r>
             <a:endParaRPr lang="en-US" sz="1700" dirty="0"/>
@@ -2759,13 +2783,18 @@
             <a:off x="6355080" y="4343400"/>
             <a:ext cx="566928" cy="566928"/>
           </a:xfrm>
-          <a:prstGeom prst="ellipse">
+          <a:prstGeom prst="rect">
             <a:avLst/>
           </a:prstGeom>
           <a:solidFill>
-            <a:srgbClr val="EEF2FF"/>
+            <a:srgbClr val="FFFFFF"/>
           </a:solidFill>
-          <a:ln/>
+          <a:ln w="15875">
+            <a:solidFill>
+              <a:srgbClr val="1F3A6B"/>
+            </a:solidFill>
+            <a:prstDash val="solid"/>
+          </a:ln>
         </p:spPr>
       </p:sp>
       <p:sp>
@@ -2793,14 +2822,17 @@
               <a:buNone/>
             </a:pPr>
             <a:r>
-              <a:rPr lang="en-US" sz="2000" dirty="0">
-                <a:solidFill>
-                  <a:srgbClr val="000000"/>
-                </a:solidFill>
-              </a:rPr>
-              <a:t>⚖️</a:t>
-            </a:r>
-            <a:endParaRPr lang="en-US" sz="2000" dirty="0"/>
+              <a:rPr lang="en-US" sz="1400" b="1" dirty="0">
+                <a:solidFill>
+                  <a:srgbClr val="1F3A6B"/>
+                </a:solidFill>
+                <a:latin typeface="Georgia" pitchFamily="34" charset="0"/>
+                <a:ea typeface="Georgia" pitchFamily="34" charset="-122"/>
+                <a:cs typeface="Georgia" pitchFamily="34" charset="-120"/>
+              </a:rPr>
+              <a:t>04</a:t>
+            </a:r>
+            <a:endParaRPr lang="en-US" sz="1400" dirty="0"/>
           </a:p>
         </p:txBody>
       </p:sp>
@@ -4177,7 +4209,7 @@
                 <a:ea typeface="Calibri" pitchFamily="34" charset="-122"/>
                 <a:cs typeface="Calibri" pitchFamily="34" charset="-120"/>
               </a:rPr>
-              <a:t>Indigo accent with semantic green / red / amber — built for clarity in a B2B analytics tool.</a:t>
+              <a:t>Navy accent with semantic green / red / amber, and one hue per area of the app — built for clarity in a B2B analytics tool.</a:t>
             </a:r>
             <a:endParaRPr lang="en-US" sz="1400" dirty="0"/>
           </a:p>
@@ -4200,7 +4232,7 @@
             </a:avLst>
           </a:prstGeom>
           <a:solidFill>
-            <a:srgbClr val="4F46E5"/>
+            <a:srgbClr val="1F3A6B"/>
           </a:solidFill>
           <a:ln/>
         </p:spPr>
@@ -4238,7 +4270,7 @@
                 <a:ea typeface="Calibri" pitchFamily="34" charset="-122"/>
                 <a:cs typeface="Calibri" pitchFamily="34" charset="-120"/>
               </a:rPr>
-              <a:t>Indigo</a:t>
+              <a:t>Navy</a:t>
             </a:r>
             <a:endParaRPr lang="en-US" sz="1200" dirty="0"/>
           </a:p>
@@ -4277,7 +4309,7 @@
                 <a:ea typeface="Calibri" pitchFamily="34" charset="-122"/>
                 <a:cs typeface="Calibri" pitchFamily="34" charset="-120"/>
               </a:rPr>
-              <a:t>#4F46E5</a:t>
+              <a:t>#1F3A6B</a:t>
             </a:r>
             <a:endParaRPr lang="en-US" sz="1000" dirty="0"/>
           </a:p>
@@ -4300,7 +4332,7 @@
             </a:avLst>
           </a:prstGeom>
           <a:solidFill>
-            <a:srgbClr val="10B981"/>
+            <a:srgbClr val="16294D"/>
           </a:solidFill>
           <a:ln/>
         </p:spPr>
@@ -4338,7 +4370,7 @@
                 <a:ea typeface="Calibri" pitchFamily="34" charset="-122"/>
                 <a:cs typeface="Calibri" pitchFamily="34" charset="-120"/>
               </a:rPr>
-              <a:t>Good</a:t>
+              <a:t>Sidebar</a:t>
             </a:r>
             <a:endParaRPr lang="en-US" sz="1200" dirty="0"/>
           </a:p>
@@ -4377,7 +4409,7 @@
                 <a:ea typeface="Calibri" pitchFamily="34" charset="-122"/>
                 <a:cs typeface="Calibri" pitchFamily="34" charset="-120"/>
               </a:rPr>
-              <a:t>#10B981</a:t>
+              <a:t>#16294D</a:t>
             </a:r>
             <a:endParaRPr lang="en-US" sz="1000" dirty="0"/>
           </a:p>
@@ -4400,7 +4432,7 @@
             </a:avLst>
           </a:prstGeom>
           <a:solidFill>
-            <a:srgbClr val="EF4444"/>
+            <a:srgbClr val="10B981"/>
           </a:solidFill>
           <a:ln/>
         </p:spPr>
@@ -4438,7 +4470,7 @@
                 <a:ea typeface="Calibri" pitchFamily="34" charset="-122"/>
                 <a:cs typeface="Calibri" pitchFamily="34" charset="-120"/>
               </a:rPr>
-              <a:t>Bad</a:t>
+              <a:t>Good</a:t>
             </a:r>
             <a:endParaRPr lang="en-US" sz="1200" dirty="0"/>
           </a:p>
@@ -4477,7 +4509,7 @@
                 <a:ea typeface="Calibri" pitchFamily="34" charset="-122"/>
                 <a:cs typeface="Calibri" pitchFamily="34" charset="-120"/>
               </a:rPr>
-              <a:t>#EF4444</a:t>
+              <a:t>#10B981</a:t>
             </a:r>
             <a:endParaRPr lang="en-US" sz="1000" dirty="0"/>
           </a:p>
@@ -4500,7 +4532,7 @@
             </a:avLst>
           </a:prstGeom>
           <a:solidFill>
-            <a:srgbClr val="F59E0B"/>
+            <a:srgbClr val="EF4444"/>
           </a:solidFill>
           <a:ln/>
         </p:spPr>
@@ -4538,7 +4570,7 @@
                 <a:ea typeface="Calibri" pitchFamily="34" charset="-122"/>
                 <a:cs typeface="Calibri" pitchFamily="34" charset="-120"/>
               </a:rPr>
-              <a:t>Warn</a:t>
+              <a:t>Bad</a:t>
             </a:r>
             <a:endParaRPr lang="en-US" sz="1200" dirty="0"/>
           </a:p>
@@ -4577,7 +4609,7 @@
                 <a:ea typeface="Calibri" pitchFamily="34" charset="-122"/>
                 <a:cs typeface="Calibri" pitchFamily="34" charset="-120"/>
               </a:rPr>
-              <a:t>#F59E0B</a:t>
+              <a:t>#EF4444</a:t>
             </a:r>
             <a:endParaRPr lang="en-US" sz="1000" dirty="0"/>
           </a:p>
@@ -4600,7 +4632,7 @@
             </a:avLst>
           </a:prstGeom>
           <a:solidFill>
-            <a:srgbClr val="06B6D4"/>
+            <a:srgbClr val="F59E0B"/>
           </a:solidFill>
           <a:ln/>
         </p:spPr>
@@ -4638,7 +4670,7 @@
                 <a:ea typeface="Calibri" pitchFamily="34" charset="-122"/>
                 <a:cs typeface="Calibri" pitchFamily="34" charset="-120"/>
               </a:rPr>
-              <a:t>Cyan</a:t>
+              <a:t>Warn</a:t>
             </a:r>
             <a:endParaRPr lang="en-US" sz="1200" dirty="0"/>
           </a:p>
@@ -4677,7 +4709,7 @@
                 <a:ea typeface="Calibri" pitchFamily="34" charset="-122"/>
                 <a:cs typeface="Calibri" pitchFamily="34" charset="-120"/>
               </a:rPr>
-              <a:t>#06B6D4</a:t>
+              <a:t>#F59E0B</a:t>
             </a:r>
             <a:endParaRPr lang="en-US" sz="1000" dirty="0"/>
           </a:p>
